--- a/stage4_genai/03_llm_api/Lecture-16-LLM-API.pptx
+++ b/stage4_genai/03_llm_api/Lecture-16-LLM-API.pptx
@@ -8309,6 +8309,9 @@
           <a:lstStyle/>
           <a:p>
             <a:r>
+              <a:rPr>
+                <a:latin typeface="Calibri"/>
+              </a:rPr>
               <a:t>AI Basic Training</a:t>
             </a:r>
           </a:p>
@@ -8330,6 +8333,9 @@
           <a:lstStyle/>
           <a:p>
             <a:r>
+              <a:rPr>
+                <a:latin typeface="Calibri"/>
+              </a:rPr>
               <a:t>Lesson 4.3  |  Stage 4: Generative AI</a:t>
             </a:r>
           </a:p>
@@ -8351,6 +8357,9 @@
           <a:lstStyle/>
           <a:p>
             <a:r>
+              <a:rPr b="1">
+                <a:latin typeface="Calibri"/>
+              </a:rPr>
               <a:t>The LLM API</a:t>
             </a:r>
           </a:p>
@@ -8372,6 +8381,9 @@
           <a:lstStyle/>
           <a:p>
             <a:r>
+              <a:rPr>
+                <a:latin typeface="Calibri"/>
+              </a:rPr>
               <a:t>Building a Threat Intelligence Assistant</a:t>
             </a:r>
           </a:p>
@@ -8411,11 +8423,17 @@
           <a:lstStyle/>
           <a:p>
             <a:r>
+              <a:rPr b="1">
+                <a:latin typeface="Calibri"/>
+              </a:rPr>
               <a:t>Provider</a:t>
             </a:r>
           </a:p>
           <a:p>
             <a:r>
+              <a:rPr b="1">
+                <a:latin typeface="Calibri"/>
+              </a:rPr>
               <a:t>Options</a:t>
             </a:r>
           </a:p>
@@ -8437,6 +8455,9 @@
           <a:lstStyle/>
           <a:p>
             <a:r>
+              <a:rPr b="1">
+                <a:latin typeface="Calibri"/>
+              </a:rPr>
               <a:t>04</a:t>
             </a:r>
           </a:p>
@@ -8476,6 +8497,9 @@
           <a:lstStyle/>
           <a:p>
             <a:r>
+              <a:rPr b="1">
+                <a:latin typeface="Calibri"/>
+              </a:rPr>
               <a:t>Four Providers - One Interface</a:t>
             </a:r>
           </a:p>
@@ -8539,6 +8563,9 @@
           <a:lstStyle/>
           <a:p>
             <a:r>
+              <a:rPr>
+                <a:latin typeface="Calibri"/>
+              </a:rPr>
               <a:t/>
             </a:r>
           </a:p>
@@ -8560,37 +8587,49 @@
           <a:lstStyle/>
           <a:p>
             <a:r>
-              <a:rPr sz="1400"/>
+              <a:rPr sz="1400">
+                <a:latin typeface="Calibri"/>
+              </a:rPr>
               <a:t>For security work, local</a:t>
             </a:r>
           </a:p>
           <a:p>
             <a:r>
-              <a:rPr sz="1400"/>
+              <a:rPr sz="1400">
+                <a:latin typeface="Calibri"/>
+              </a:rPr>
               <a:t>models keep sensitive data</a:t>
             </a:r>
           </a:p>
           <a:p>
             <a:r>
-              <a:rPr sz="1400"/>
+              <a:rPr sz="1400">
+                <a:latin typeface="Calibri"/>
+              </a:rPr>
               <a:t>on your machine.</a:t>
             </a:r>
           </a:p>
           <a:p>
             <a:r>
-              <a:rPr sz="1400"/>
+              <a:rPr sz="1400">
+                <a:latin typeface="Calibri"/>
+              </a:rPr>
               <a:t/>
             </a:r>
           </a:p>
           <a:p>
             <a:r>
-              <a:rPr sz="1400"/>
+              <a:rPr sz="1400">
+                <a:latin typeface="Calibri"/>
+              </a:rPr>
               <a:t>Trade-off: less capable</a:t>
             </a:r>
           </a:p>
           <a:p>
             <a:r>
-              <a:rPr sz="1400"/>
+              <a:rPr sz="1400">
+                <a:latin typeface="Calibri"/>
+              </a:rPr>
               <a:t>than cloud APIs.</a:t>
             </a:r>
           </a:p>
@@ -8612,6 +8651,9 @@
           <a:lstStyle/>
           <a:p>
             <a:r>
+              <a:rPr b="1">
+                <a:latin typeface="Calibri"/>
+              </a:rPr>
               <a:t>Running Locally with Ollama</a:t>
             </a:r>
           </a:p>
@@ -8633,55 +8675,73 @@
           <a:lstStyle/>
           <a:p>
             <a:r>
-              <a:rPr sz="1400"/>
+              <a:rPr sz="1400">
+                <a:latin typeface="Calibri"/>
+              </a:rPr>
               <a:t>Sensitive data never leaves your machine</a:t>
             </a:r>
           </a:p>
           <a:p>
             <a:r>
-              <a:rPr sz="1400"/>
+              <a:rPr sz="1400">
+                <a:latin typeface="Calibri"/>
+              </a:rPr>
               <a:t>  Malware samples, IR reports, CVEs</a:t>
             </a:r>
           </a:p>
           <a:p>
             <a:r>
-              <a:rPr sz="1400"/>
+              <a:rPr sz="1400">
+                <a:latin typeface="Calibri"/>
+              </a:rPr>
               <a:t/>
             </a:r>
           </a:p>
           <a:p>
             <a:r>
-              <a:rPr sz="1400"/>
+              <a:rPr sz="1400">
+                <a:latin typeface="Calibri"/>
+              </a:rPr>
               <a:t>No API key, no internet after download</a:t>
             </a:r>
           </a:p>
           <a:p>
             <a:r>
-              <a:rPr sz="1400"/>
+              <a:rPr sz="1400">
+                <a:latin typeface="Calibri"/>
+              </a:rPr>
               <a:t>  Works in air-gapped environments</a:t>
             </a:r>
           </a:p>
           <a:p>
             <a:r>
-              <a:rPr sz="1400"/>
+              <a:rPr sz="1400">
+                <a:latin typeface="Calibri"/>
+              </a:rPr>
               <a:t/>
             </a:r>
           </a:p>
           <a:p>
             <a:r>
-              <a:rPr sz="1400"/>
+              <a:rPr sz="1400">
+                <a:latin typeface="Calibri"/>
+              </a:rPr>
               <a:t>Setup:</a:t>
             </a:r>
           </a:p>
           <a:p>
             <a:r>
-              <a:rPr sz="1400"/>
+              <a:rPr sz="1400">
+                <a:latin typeface="Calibri"/>
+              </a:rPr>
               <a:t>  ollama pull huihui_ai/qwen3.5-abliterated:2B</a:t>
             </a:r>
           </a:p>
           <a:p>
             <a:r>
-              <a:rPr sz="1400"/>
+              <a:rPr sz="1400">
+                <a:latin typeface="Calibri"/>
+              </a:rPr>
               <a:t>  set OLLAMA_MODEL=&lt;model-name&gt;</a:t>
             </a:r>
           </a:p>
@@ -8721,11 +8781,17 @@
           <a:lstStyle/>
           <a:p>
             <a:r>
+              <a:rPr b="1">
+                <a:latin typeface="Calibri"/>
+              </a:rPr>
               <a:t>Workshop</a:t>
             </a:r>
           </a:p>
           <a:p>
             <a:r>
+              <a:rPr b="1">
+                <a:latin typeface="Calibri"/>
+              </a:rPr>
               <a:t>and Next Steps</a:t>
             </a:r>
           </a:p>
@@ -8747,6 +8813,9 @@
           <a:lstStyle/>
           <a:p>
             <a:r>
+              <a:rPr b="1">
+                <a:latin typeface="Calibri"/>
+              </a:rPr>
               <a:t>05</a:t>
             </a:r>
           </a:p>
@@ -8786,6 +8855,9 @@
           <a:lstStyle/>
           <a:p>
             <a:r>
+              <a:rPr b="1">
+                <a:latin typeface="Calibri"/>
+              </a:rPr>
               <a:t>Workshop: 4 Hands-On Exercises</a:t>
             </a:r>
           </a:p>
@@ -8807,37 +8879,49 @@
           <a:lstStyle/>
           <a:p>
             <a:r>
-              <a:rPr sz="1600"/>
+              <a:rPr sz="1600">
+                <a:latin typeface="Calibri"/>
+              </a:rPr>
               <a:t>Exercise 1:  First API call - understand request/response structure</a:t>
             </a:r>
           </a:p>
           <a:p>
             <a:r>
-              <a:rPr sz="1600"/>
+              <a:rPr sz="1600">
+                <a:latin typeface="Calibri"/>
+              </a:rPr>
               <a:t>Exercise 2:  System prompts - security analyst persona, tone control</a:t>
             </a:r>
           </a:p>
           <a:p>
             <a:r>
-              <a:rPr sz="1600"/>
+              <a:rPr sz="1600">
+                <a:latin typeface="Calibri"/>
+              </a:rPr>
               <a:t>Exercise 3:  Structured output - JSON for pipeline integration</a:t>
             </a:r>
           </a:p>
           <a:p>
             <a:r>
-              <a:rPr sz="1600"/>
+              <a:rPr sz="1600">
+                <a:latin typeface="Calibri"/>
+              </a:rPr>
               <a:t>Exercise 4:  Multi-turn conversation - maintaining context across turns</a:t>
             </a:r>
           </a:p>
           <a:p>
             <a:r>
-              <a:rPr sz="1600"/>
+              <a:rPr sz="1600">
+                <a:latin typeface="Calibri"/>
+              </a:rPr>
               <a:t/>
             </a:r>
           </a:p>
           <a:p>
             <a:r>
-              <a:rPr sz="1600"/>
+              <a:rPr sz="1600">
+                <a:latin typeface="Calibri"/>
+              </a:rPr>
               <a:t>Requires one API key (any provider) or Ollama for local</a:t>
             </a:r>
           </a:p>
@@ -8877,37 +8961,49 @@
           <a:lstStyle/>
           <a:p>
             <a:r>
-              <a:rPr sz="1500"/>
+              <a:rPr sz="1500">
+                <a:latin typeface="Calibri"/>
+              </a:rPr>
               <a:t>LLM APIs give you general-purpose AI directed by natural language</a:t>
             </a:r>
           </a:p>
           <a:p>
             <a:r>
-              <a:rPr sz="1500"/>
+              <a:rPr sz="1500">
+                <a:latin typeface="Calibri"/>
+              </a:rPr>
               <a:t>The system prompt defines behaviour - this IS prompt engineering</a:t>
             </a:r>
           </a:p>
           <a:p>
             <a:r>
-              <a:rPr sz="1500"/>
+              <a:rPr sz="1500">
+                <a:latin typeface="Calibri"/>
+              </a:rPr>
               <a:t>Multi-turn conversations maintain context via message history</a:t>
             </a:r>
           </a:p>
           <a:p>
             <a:r>
-              <a:rPr sz="1500"/>
+              <a:rPr sz="1500">
+                <a:latin typeface="Calibri"/>
+              </a:rPr>
               <a:t>Structured JSON output enables automated pipeline integration</a:t>
             </a:r>
           </a:p>
           <a:p>
             <a:r>
-              <a:rPr sz="1500"/>
+              <a:rPr sz="1500">
+                <a:latin typeface="Calibri"/>
+              </a:rPr>
               <a:t>Ollama runs locally for sensitive security data (no API key needed)</a:t>
             </a:r>
           </a:p>
           <a:p>
             <a:r>
-              <a:rPr sz="1500"/>
+              <a:rPr sz="1500">
+                <a:latin typeface="Calibri"/>
+              </a:rPr>
               <a:t>Next: RAG - ground the model's answers in your own documents</a:t>
             </a:r>
           </a:p>
@@ -8929,11 +9025,17 @@
           <a:lstStyle/>
           <a:p>
             <a:r>
+              <a:rPr b="1">
+                <a:latin typeface="Calibri"/>
+              </a:rPr>
               <a:t>Key</a:t>
             </a:r>
           </a:p>
           <a:p>
             <a:r>
+              <a:rPr b="1">
+                <a:latin typeface="Calibri"/>
+              </a:rPr>
               <a:t>Takeaways</a:t>
             </a:r>
           </a:p>
@@ -8973,6 +9075,9 @@
           <a:lstStyle/>
           <a:p>
             <a:r>
+              <a:rPr>
+                <a:latin typeface="Calibri"/>
+              </a:rPr>
               <a:t>Next:  Lesson 4.4 - RAG (Retrieval-Augmented Generation)</a:t>
             </a:r>
           </a:p>
@@ -8994,6 +9099,9 @@
           <a:lstStyle/>
           <a:p>
             <a:r>
+              <a:rPr b="1">
+                <a:latin typeface="Calibri"/>
+              </a:rPr>
               <a:t>The LLM API</a:t>
             </a:r>
           </a:p>
@@ -9033,31 +9141,41 @@
           <a:lstStyle/>
           <a:p>
             <a:r>
-              <a:rPr sz="1600"/>
+              <a:rPr sz="1600">
+                <a:latin typeface="Calibri"/>
+              </a:rPr>
               <a:t>From pipelines to conversational AI</a:t>
             </a:r>
           </a:p>
           <a:p>
             <a:r>
-              <a:rPr sz="1600"/>
+              <a:rPr sz="1600">
+                <a:latin typeface="Calibri"/>
+              </a:rPr>
               <a:t>The system prompt - your most powerful tool</a:t>
             </a:r>
           </a:p>
           <a:p>
             <a:r>
-              <a:rPr sz="1600"/>
+              <a:rPr sz="1600">
+                <a:latin typeface="Calibri"/>
+              </a:rPr>
               <a:t>Multi-turn conversations</a:t>
             </a:r>
           </a:p>
           <a:p>
             <a:r>
-              <a:rPr sz="1600"/>
+              <a:rPr sz="1600">
+                <a:latin typeface="Calibri"/>
+              </a:rPr>
               <a:t>Structured JSON output for pipeline integration</a:t>
             </a:r>
           </a:p>
           <a:p>
             <a:r>
-              <a:rPr sz="1600"/>
+              <a:rPr sz="1600">
+                <a:latin typeface="Calibri"/>
+              </a:rPr>
               <a:t>Provider options: Claude, OpenAI, Gemini, Ollama</a:t>
             </a:r>
           </a:p>
@@ -9079,6 +9197,9 @@
           <a:lstStyle/>
           <a:p>
             <a:r>
+              <a:rPr b="1">
+                <a:latin typeface="Calibri"/>
+              </a:rPr>
               <a:t>What We'll Cover</a:t>
             </a:r>
           </a:p>
@@ -9118,11 +9239,17 @@
           <a:lstStyle/>
           <a:p>
             <a:r>
+              <a:rPr b="1">
+                <a:latin typeface="Calibri"/>
+              </a:rPr>
               <a:t>The API</a:t>
             </a:r>
           </a:p>
           <a:p>
             <a:r>
+              <a:rPr b="1">
+                <a:latin typeface="Calibri"/>
+              </a:rPr>
               <a:t>Pattern</a:t>
             </a:r>
           </a:p>
@@ -9144,6 +9271,9 @@
           <a:lstStyle/>
           <a:p>
             <a:r>
+              <a:rPr b="1">
+                <a:latin typeface="Calibri"/>
+              </a:rPr>
               <a:t>01</a:t>
             </a:r>
           </a:p>
@@ -9183,6 +9313,9 @@
           <a:lstStyle/>
           <a:p>
             <a:r>
+              <a:rPr b="1">
+                <a:latin typeface="Calibri"/>
+              </a:rPr>
               <a:t>System Prompt + User Message = Structured Response</a:t>
             </a:r>
           </a:p>
@@ -9246,6 +9379,9 @@
           <a:lstStyle/>
           <a:p>
             <a:r>
+              <a:rPr b="1">
+                <a:latin typeface="Calibri"/>
+              </a:rPr>
               <a:t>The Code Pattern</a:t>
             </a:r>
           </a:p>
@@ -9267,61 +9403,81 @@
           <a:lstStyle/>
           <a:p>
             <a:r>
-              <a:rPr sz="1500"/>
+              <a:rPr sz="1500">
+                <a:latin typeface="Calibri"/>
+              </a:rPr>
               <a:t>from llm_client import get_client</a:t>
             </a:r>
           </a:p>
           <a:p>
             <a:r>
-              <a:rPr sz="1500"/>
+              <a:rPr sz="1500">
+                <a:latin typeface="Calibri"/>
+              </a:rPr>
               <a:t>provider, client = get_client()   # auto-detects your key</a:t>
             </a:r>
           </a:p>
           <a:p>
             <a:r>
-              <a:rPr sz="1500"/>
+              <a:rPr sz="1500">
+                <a:latin typeface="Calibri"/>
+              </a:rPr>
               <a:t/>
             </a:r>
           </a:p>
           <a:p>
             <a:r>
-              <a:rPr sz="1500"/>
+              <a:rPr sz="1500">
+                <a:latin typeface="Calibri"/>
+              </a:rPr>
               <a:t>response = client.chat(</a:t>
             </a:r>
           </a:p>
           <a:p>
             <a:r>
-              <a:rPr sz="1500"/>
+              <a:rPr sz="1500">
+                <a:latin typeface="Calibri"/>
+              </a:rPr>
               <a:t>    system='You are a threat intel analyst. Be concise.',</a:t>
             </a:r>
           </a:p>
           <a:p>
             <a:r>
-              <a:rPr sz="1500"/>
+              <a:rPr sz="1500">
+                <a:latin typeface="Calibri"/>
+              </a:rPr>
               <a:t>    messages=[{"role": "user",</a:t>
             </a:r>
           </a:p>
           <a:p>
             <a:r>
-              <a:rPr sz="1500"/>
+              <a:rPr sz="1500">
+                <a:latin typeface="Calibri"/>
+              </a:rPr>
               <a:t>        "content": "Analyse this log entry: ..."}]</a:t>
             </a:r>
           </a:p>
           <a:p>
             <a:r>
-              <a:rPr sz="1500"/>
+              <a:rPr sz="1500">
+                <a:latin typeface="Calibri"/>
+              </a:rPr>
               <a:t>)</a:t>
             </a:r>
           </a:p>
           <a:p>
             <a:r>
-              <a:rPr sz="1500"/>
+              <a:rPr sz="1500">
+                <a:latin typeface="Calibri"/>
+              </a:rPr>
               <a:t/>
             </a:r>
           </a:p>
           <a:p>
             <a:r>
-              <a:rPr sz="1500"/>
+              <a:rPr sz="1500">
+                <a:latin typeface="Calibri"/>
+              </a:rPr>
               <a:t>Same code works with any provider (Claude, OpenAI, Gemini, Ollama)</a:t>
             </a:r>
           </a:p>
@@ -9361,11 +9517,17 @@
           <a:lstStyle/>
           <a:p>
             <a:r>
+              <a:rPr b="1">
+                <a:latin typeface="Calibri"/>
+              </a:rPr>
               <a:t>The System</a:t>
             </a:r>
           </a:p>
           <a:p>
             <a:r>
+              <a:rPr b="1">
+                <a:latin typeface="Calibri"/>
+              </a:rPr>
               <a:t>Prompt</a:t>
             </a:r>
           </a:p>
@@ -9387,6 +9549,9 @@
           <a:lstStyle/>
           <a:p>
             <a:r>
+              <a:rPr b="1">
+                <a:latin typeface="Calibri"/>
+              </a:rPr>
               <a:t>02</a:t>
             </a:r>
           </a:p>
@@ -9426,6 +9591,9 @@
           <a:lstStyle/>
           <a:p>
             <a:r>
+              <a:rPr>
+                <a:latin typeface="Calibri"/>
+              </a:rPr>
               <a:t/>
             </a:r>
           </a:p>
@@ -9447,31 +9615,41 @@
           <a:lstStyle/>
           <a:p>
             <a:r>
-              <a:rPr sz="1400"/>
+              <a:rPr sz="1400">
+                <a:latin typeface="Calibri"/>
+              </a:rPr>
               <a:t>A well-crafted system prompt</a:t>
             </a:r>
           </a:p>
           <a:p>
             <a:r>
-              <a:rPr sz="1400"/>
+              <a:rPr sz="1400">
+                <a:latin typeface="Calibri"/>
+              </a:rPr>
               <a:t>turns a general-purpose LLM</a:t>
             </a:r>
           </a:p>
           <a:p>
             <a:r>
-              <a:rPr sz="1400"/>
+              <a:rPr sz="1400">
+                <a:latin typeface="Calibri"/>
+              </a:rPr>
               <a:t>into a specialist.</a:t>
             </a:r>
           </a:p>
           <a:p>
             <a:r>
-              <a:rPr sz="1400"/>
+              <a:rPr sz="1400">
+                <a:latin typeface="Calibri"/>
+              </a:rPr>
               <a:t/>
             </a:r>
           </a:p>
           <a:p>
             <a:r>
-              <a:rPr sz="1400"/>
+              <a:rPr sz="1400">
+                <a:latin typeface="Calibri"/>
+              </a:rPr>
               <a:t>This is prompt engineering.</a:t>
             </a:r>
           </a:p>
@@ -9493,6 +9671,9 @@
           <a:lstStyle/>
           <a:p>
             <a:r>
+              <a:rPr b="1">
+                <a:latin typeface="Calibri"/>
+              </a:rPr>
               <a:t>Your Most Powerful Tool</a:t>
             </a:r>
           </a:p>
@@ -9514,55 +9695,73 @@
           <a:lstStyle/>
           <a:p>
             <a:r>
-              <a:rPr sz="1400"/>
+              <a:rPr sz="1400">
+                <a:latin typeface="Calibri"/>
+              </a:rPr>
               <a:t>The system prompt defines behaviour:</a:t>
             </a:r>
           </a:p>
           <a:p>
             <a:r>
-              <a:rPr sz="1400"/>
+              <a:rPr sz="1400">
+                <a:latin typeface="Calibri"/>
+              </a:rPr>
               <a:t/>
             </a:r>
           </a:p>
           <a:p>
             <a:r>
-              <a:rPr sz="1400"/>
+              <a:rPr sz="1400">
+                <a:latin typeface="Calibri"/>
+              </a:rPr>
               <a:t>  Role: 'You are a cybersecurity analyst'</a:t>
             </a:r>
           </a:p>
           <a:p>
             <a:r>
-              <a:rPr sz="1400"/>
+              <a:rPr sz="1400">
+                <a:latin typeface="Calibri"/>
+              </a:rPr>
               <a:t>  Task: 'Identify MITRE ATT&amp;CK tactic'</a:t>
             </a:r>
           </a:p>
           <a:p>
             <a:r>
-              <a:rPr sz="1400"/>
+              <a:rPr sz="1400">
+                <a:latin typeface="Calibri"/>
+              </a:rPr>
               <a:t>  Format: 'Use bullet points'</a:t>
             </a:r>
           </a:p>
           <a:p>
             <a:r>
-              <a:rPr sz="1400"/>
+              <a:rPr sz="1400">
+                <a:latin typeface="Calibri"/>
+              </a:rPr>
               <a:t>  Constraints: 'Be concise, technical'</a:t>
             </a:r>
           </a:p>
           <a:p>
             <a:r>
-              <a:rPr sz="1400"/>
+              <a:rPr sz="1400">
+                <a:latin typeface="Calibri"/>
+              </a:rPr>
               <a:t/>
             </a:r>
           </a:p>
           <a:p>
             <a:r>
-              <a:rPr sz="1400"/>
+              <a:rPr sz="1400">
+                <a:latin typeface="Calibri"/>
+              </a:rPr>
               <a:t>Quality of system prompt =</a:t>
             </a:r>
           </a:p>
           <a:p>
             <a:r>
-              <a:rPr sz="1400"/>
+              <a:rPr sz="1400">
+                <a:latin typeface="Calibri"/>
+              </a:rPr>
               <a:t>quality of output</a:t>
             </a:r>
           </a:p>
@@ -9602,11 +9801,17 @@
           <a:lstStyle/>
           <a:p>
             <a:r>
+              <a:rPr b="1">
+                <a:latin typeface="Calibri"/>
+              </a:rPr>
               <a:t>Conversations</a:t>
             </a:r>
           </a:p>
           <a:p>
             <a:r>
+              <a:rPr b="1">
+                <a:latin typeface="Calibri"/>
+              </a:rPr>
               <a:t>and JSON Output</a:t>
             </a:r>
           </a:p>
@@ -9628,6 +9833,9 @@
           <a:lstStyle/>
           <a:p>
             <a:r>
+              <a:rPr b="1">
+                <a:latin typeface="Calibri"/>
+              </a:rPr>
               <a:t>03</a:t>
             </a:r>
           </a:p>
@@ -9667,6 +9875,9 @@
           <a:lstStyle/>
           <a:p>
             <a:r>
+              <a:rPr b="1">
+                <a:latin typeface="Calibri"/>
+              </a:rPr>
               <a:t>Two Key Patterns</a:t>
             </a:r>
           </a:p>
@@ -9688,61 +9899,81 @@
           <a:lstStyle/>
           <a:p>
             <a:r>
-              <a:rPr sz="1400"/>
+              <a:rPr sz="1400">
+                <a:latin typeface="Calibri"/>
+              </a:rPr>
               <a:t>Multi-turn conversation:</a:t>
             </a:r>
           </a:p>
           <a:p>
             <a:r>
-              <a:rPr sz="1400"/>
+              <a:rPr sz="1400">
+                <a:latin typeface="Calibri"/>
+              </a:rPr>
               <a:t/>
             </a:r>
           </a:p>
           <a:p>
             <a:r>
-              <a:rPr sz="1400"/>
+              <a:rPr sz="1400">
+                <a:latin typeface="Calibri"/>
+              </a:rPr>
               <a:t>messages = [</a:t>
             </a:r>
           </a:p>
           <a:p>
             <a:r>
-              <a:rPr sz="1400"/>
+              <a:rPr sz="1400">
+                <a:latin typeface="Calibri"/>
+              </a:rPr>
               <a:t>  {"role": "user",</a:t>
             </a:r>
           </a:p>
           <a:p>
             <a:r>
-              <a:rPr sz="1400"/>
+              <a:rPr sz="1400">
+                <a:latin typeface="Calibri"/>
+              </a:rPr>
               <a:t>   "content": "What is this?"},</a:t>
             </a:r>
           </a:p>
           <a:p>
             <a:r>
-              <a:rPr sz="1400"/>
+              <a:rPr sz="1400">
+                <a:latin typeface="Calibri"/>
+              </a:rPr>
               <a:t>  {"role": "assistant",</a:t>
             </a:r>
           </a:p>
           <a:p>
             <a:r>
-              <a:rPr sz="1400"/>
+              <a:rPr sz="1400">
+                <a:latin typeface="Calibri"/>
+              </a:rPr>
               <a:t>   "content": "This is a..."},</a:t>
             </a:r>
           </a:p>
           <a:p>
             <a:r>
-              <a:rPr sz="1400"/>
+              <a:rPr sz="1400">
+                <a:latin typeface="Calibri"/>
+              </a:rPr>
               <a:t>  {"role": "user",</a:t>
             </a:r>
           </a:p>
           <a:p>
             <a:r>
-              <a:rPr sz="1400"/>
+              <a:rPr sz="1400">
+                <a:latin typeface="Calibri"/>
+              </a:rPr>
               <a:t>   "content": "What to do?"}</a:t>
             </a:r>
           </a:p>
           <a:p>
             <a:r>
-              <a:rPr sz="1400"/>
+              <a:rPr sz="1400">
+                <a:latin typeface="Calibri"/>
+              </a:rPr>
               <a:t>]</a:t>
             </a:r>
           </a:p>
@@ -9764,61 +9995,81 @@
           <a:lstStyle/>
           <a:p>
             <a:r>
-              <a:rPr sz="1400"/>
+              <a:rPr sz="1400">
+                <a:latin typeface="Calibri"/>
+              </a:rPr>
               <a:t>Structured JSON output:</a:t>
             </a:r>
           </a:p>
           <a:p>
             <a:r>
-              <a:rPr sz="1400"/>
+              <a:rPr sz="1400">
+                <a:latin typeface="Calibri"/>
+              </a:rPr>
               <a:t/>
             </a:r>
           </a:p>
           <a:p>
             <a:r>
-              <a:rPr sz="1400"/>
+              <a:rPr sz="1400">
+                <a:latin typeface="Calibri"/>
+              </a:rPr>
               <a:t>system = 'Respond with valid</a:t>
             </a:r>
           </a:p>
           <a:p>
             <a:r>
-              <a:rPr sz="1400"/>
+              <a:rPr sz="1400">
+                <a:latin typeface="Calibri"/>
+              </a:rPr>
               <a:t>  JSON only. No prose.'</a:t>
             </a:r>
           </a:p>
           <a:p>
             <a:r>
-              <a:rPr sz="1400"/>
+              <a:rPr sz="1400">
+                <a:latin typeface="Calibri"/>
+              </a:rPr>
               <a:t/>
             </a:r>
           </a:p>
           <a:p>
             <a:r>
-              <a:rPr sz="1400"/>
+              <a:rPr sz="1400">
+                <a:latin typeface="Calibri"/>
+              </a:rPr>
               <a:t>Fields: tactic, severity,</a:t>
             </a:r>
           </a:p>
           <a:p>
             <a:r>
-              <a:rPr sz="1400"/>
+              <a:rPr sz="1400">
+                <a:latin typeface="Calibri"/>
+              </a:rPr>
               <a:t>  confidence, recommendations</a:t>
             </a:r>
           </a:p>
           <a:p>
             <a:r>
-              <a:rPr sz="1400"/>
+              <a:rPr sz="1400">
+                <a:latin typeface="Calibri"/>
+              </a:rPr>
               <a:t/>
             </a:r>
           </a:p>
           <a:p>
             <a:r>
-              <a:rPr sz="1400"/>
+              <a:rPr sz="1400">
+                <a:latin typeface="Calibri"/>
+              </a:rPr>
               <a:t>This is how you integrate</a:t>
             </a:r>
           </a:p>
           <a:p>
             <a:r>
-              <a:rPr sz="1400"/>
+              <a:rPr sz="1400">
+                <a:latin typeface="Calibri"/>
+              </a:rPr>
               <a:t>LLMs into automated pipelines</a:t>
             </a:r>
           </a:p>
